--- a/training/decks/t2-phones.pptx
+++ b/training/decks/t2-phones.pptx
@@ -4378,7 +4378,7 @@
                 </a:solidFill>
                 <a:latin typeface="Noto Sans"/>
               </a:rPr>
-              <a:t>•  Present › More › Connect a phone or tablet</a:t>
+              <a:t>•  Present › Remotes › Connect a phone or tablet</a:t>
             </a:r>
           </a:p>
           <a:p>
